--- a/src/ppt-super/assets/tpl-102-insight-evolution-path/template.pptx
+++ b/src/ppt-super/assets/tpl-102-insight-evolution-path/template.pptx
@@ -3104,8 +3104,8 @@
         </p:nvSpPr>
         <p:spPr>
           <a:xfrm>
-            <a:off x="279400" y="127000"/>
-            <a:ext cx="2413000" cy="215900"/>
+            <a:off x="279400" y="109537"/>
+            <a:ext cx="2413000" cy="250825"/>
           </a:xfrm>
           <a:prstGeom prst="rect">
             <a:avLst/>
@@ -3118,9 +3118,16 @@
           </a:bodyPr>
           <a:lstStyle/>
           <a:p>
-            <a:pPr algn="l"/>
-            <a:r>
-              <a:rPr sz="1500" b="0">
+            <a:pPr algn="l">
+              <a:spcBef>
+                <a:spcPts val="0"/>
+              </a:spcBef>
+              <a:spcAft>
+                <a:spcPts val="0"/>
+              </a:spcAft>
+            </a:pPr>
+            <a:r>
+              <a:rPr sz="1500" b="0" lang="zh-CN" altLang="zh-CN">
                 <a:solidFill>
                   <a:srgbClr val="617089"/>
                 </a:solidFill>
@@ -3155,9 +3162,16 @@
           </a:bodyPr>
           <a:lstStyle/>
           <a:p>
-            <a:pPr algn="r"/>
-            <a:r>
-              <a:rPr sz="1400" b="0">
+            <a:pPr algn="r">
+              <a:spcBef>
+                <a:spcPts val="0"/>
+              </a:spcBef>
+              <a:spcAft>
+                <a:spcPts val="0"/>
+              </a:spcAft>
+            </a:pPr>
+            <a:r>
+              <a:rPr sz="1400" b="0" lang="zh-CN" altLang="zh-CN">
                 <a:solidFill>
                   <a:srgbClr val="617089"/>
                 </a:solidFill>
@@ -3227,9 +3241,16 @@
           </a:bodyPr>
           <a:lstStyle/>
           <a:p>
-            <a:pPr algn="l"/>
-            <a:r>
-              <a:rPr sz="2500" b="1">
+            <a:pPr algn="l">
+              <a:spcBef>
+                <a:spcPts val="0"/>
+              </a:spcBef>
+              <a:spcAft>
+                <a:spcPts val="0"/>
+              </a:spcAft>
+            </a:pPr>
+            <a:r>
+              <a:rPr sz="2500" b="1" lang="zh-CN" altLang="zh-CN">
                 <a:solidFill>
                   <a:srgbClr val="B90A0A"/>
                 </a:solidFill>
@@ -3264,9 +3285,16 @@
           </a:bodyPr>
           <a:lstStyle/>
           <a:p>
-            <a:pPr algn="l"/>
-            <a:r>
-              <a:rPr sz="1400" b="0">
+            <a:pPr algn="l">
+              <a:spcBef>
+                <a:spcPts val="0"/>
+              </a:spcBef>
+              <a:spcAft>
+                <a:spcPts val="0"/>
+              </a:spcAft>
+            </a:pPr>
+            <a:r>
+              <a:rPr sz="1400" b="0" lang="zh-CN" altLang="zh-CN">
                 <a:solidFill>
                   <a:srgbClr val="14213D"/>
                 </a:solidFill>
@@ -3301,9 +3329,16 @@
           </a:bodyPr>
           <a:lstStyle/>
           <a:p>
-            <a:pPr algn="r"/>
-            <a:r>
-              <a:rPr sz="900" b="0">
+            <a:pPr algn="r">
+              <a:spcBef>
+                <a:spcPts val="0"/>
+              </a:spcBef>
+              <a:spcAft>
+                <a:spcPts val="0"/>
+              </a:spcAft>
+            </a:pPr>
+            <a:r>
+              <a:rPr sz="900" b="0" lang="zh-CN" altLang="zh-CN">
                 <a:solidFill>
                   <a:srgbClr val="617089"/>
                 </a:solidFill>
@@ -3357,7 +3392,14 @@
           <a:bodyPr rtlCol="0" anchor="ctr"/>
           <a:lstStyle/>
           <a:p>
-            <a:pPr algn="ctr"/>
+            <a:pPr algn="ctr">
+              <a:spcBef>
+                <a:spcPts val="0"/>
+              </a:spcBef>
+              <a:spcAft>
+                <a:spcPts val="0"/>
+              </a:spcAft>
+            </a:pPr>
           </a:p>
         </p:txBody>
       </p:sp>
@@ -3404,8 +3446,8 @@
         </p:nvSpPr>
         <p:spPr>
           <a:xfrm>
-            <a:off x="749300" y="1727200"/>
-            <a:ext cx="508000" cy="317500"/>
+            <a:off x="749300" y="1691957"/>
+            <a:ext cx="508000" cy="387985"/>
           </a:xfrm>
           <a:prstGeom prst="rect">
             <a:avLst/>
@@ -3418,9 +3460,16 @@
           </a:bodyPr>
           <a:lstStyle/>
           <a:p>
-            <a:pPr algn="ctr"/>
-            <a:r>
-              <a:rPr sz="2400" b="1">
+            <a:pPr algn="ctr">
+              <a:spcBef>
+                <a:spcPts val="0"/>
+              </a:spcBef>
+              <a:spcAft>
+                <a:spcPts val="0"/>
+              </a:spcAft>
+            </a:pPr>
+            <a:r>
+              <a:rPr sz="2400" b="1" lang="zh-CN" altLang="zh-CN">
                 <a:solidFill>
                   <a:srgbClr val="0B3D91"/>
                 </a:solidFill>
@@ -3441,8 +3490,8 @@
         </p:nvSpPr>
         <p:spPr>
           <a:xfrm>
-            <a:off x="1270000" y="1765300"/>
-            <a:ext cx="1409700" cy="215900"/>
+            <a:off x="1270000" y="1740217"/>
+            <a:ext cx="1409700" cy="266065"/>
           </a:xfrm>
           <a:prstGeom prst="rect">
             <a:avLst/>
@@ -3455,9 +3504,16 @@
           </a:bodyPr>
           <a:lstStyle/>
           <a:p>
-            <a:pPr algn="l"/>
-            <a:r>
-              <a:rPr sz="1600" b="1">
+            <a:pPr algn="l">
+              <a:spcBef>
+                <a:spcPts val="0"/>
+              </a:spcBef>
+              <a:spcAft>
+                <a:spcPts val="0"/>
+              </a:spcAft>
+            </a:pPr>
+            <a:r>
+              <a:rPr sz="1600" b="1" lang="zh-CN" altLang="zh-CN">
                 <a:solidFill>
                   <a:srgbClr val="14213D"/>
                 </a:solidFill>
@@ -3492,9 +3548,16 @@
           </a:bodyPr>
           <a:lstStyle/>
           <a:p>
-            <a:pPr algn="l"/>
-            <a:r>
-              <a:rPr sz="1050" b="0">
+            <a:pPr algn="l">
+              <a:spcBef>
+                <a:spcPts val="0"/>
+              </a:spcBef>
+              <a:spcAft>
+                <a:spcPts val="0"/>
+              </a:spcAft>
+            </a:pPr>
+            <a:r>
+              <a:rPr sz="1050" b="0" lang="zh-CN" altLang="zh-CN">
                 <a:solidFill>
                   <a:srgbClr val="14213D"/>
                 </a:solidFill>
@@ -3548,7 +3611,14 @@
           <a:bodyPr rtlCol="0" anchor="ctr"/>
           <a:lstStyle/>
           <a:p>
-            <a:pPr algn="ctr"/>
+            <a:pPr algn="ctr">
+              <a:spcBef>
+                <a:spcPts val="0"/>
+              </a:spcBef>
+              <a:spcAft>
+                <a:spcPts val="0"/>
+              </a:spcAft>
+            </a:pPr>
           </a:p>
         </p:txBody>
       </p:sp>
@@ -3594,7 +3664,14 @@
           <a:bodyPr rtlCol="0" anchor="ctr"/>
           <a:lstStyle/>
           <a:p>
-            <a:pPr algn="ctr"/>
+            <a:pPr algn="ctr">
+              <a:spcBef>
+                <a:spcPts val="0"/>
+              </a:spcBef>
+              <a:spcAft>
+                <a:spcPts val="0"/>
+              </a:spcAft>
+            </a:pPr>
           </a:p>
         </p:txBody>
       </p:sp>
@@ -3692,9 +3769,16 @@
           </a:bodyPr>
           <a:lstStyle/>
           <a:p>
-            <a:pPr algn="ctr"/>
-            <a:r>
-              <a:rPr sz="1100" b="0">
+            <a:pPr algn="ctr">
+              <a:spcBef>
+                <a:spcPts val="0"/>
+              </a:spcBef>
+              <a:spcAft>
+                <a:spcPts val="0"/>
+              </a:spcAft>
+            </a:pPr>
+            <a:r>
+              <a:rPr sz="1100" b="0" lang="zh-CN" altLang="zh-CN">
                 <a:solidFill>
                   <a:srgbClr val="617089"/>
                 </a:solidFill>
@@ -3729,9 +3813,16 @@
           </a:bodyPr>
           <a:lstStyle/>
           <a:p>
-            <a:pPr algn="l"/>
-            <a:r>
-              <a:rPr sz="1000" b="0">
+            <a:pPr algn="l">
+              <a:spcBef>
+                <a:spcPts val="0"/>
+              </a:spcBef>
+              <a:spcAft>
+                <a:spcPts val="0"/>
+              </a:spcAft>
+            </a:pPr>
+            <a:r>
+              <a:rPr sz="1000" b="0" lang="zh-CN" altLang="zh-CN">
                 <a:solidFill>
                   <a:srgbClr val="14213D"/>
                 </a:solidFill>
@@ -3766,9 +3857,16 @@
           </a:bodyPr>
           <a:lstStyle/>
           <a:p>
-            <a:pPr algn="l"/>
-            <a:r>
-              <a:rPr sz="1000" b="0">
+            <a:pPr algn="l">
+              <a:spcBef>
+                <a:spcPts val="0"/>
+              </a:spcBef>
+              <a:spcAft>
+                <a:spcPts val="0"/>
+              </a:spcAft>
+            </a:pPr>
+            <a:r>
+              <a:rPr sz="1000" b="0" lang="zh-CN" altLang="zh-CN">
                 <a:solidFill>
                   <a:srgbClr val="14213D"/>
                 </a:solidFill>
@@ -3789,8 +3887,8 @@
         </p:nvSpPr>
         <p:spPr>
           <a:xfrm>
-            <a:off x="2813050" y="1727200"/>
-            <a:ext cx="508000" cy="317500"/>
+            <a:off x="2813050" y="1691957"/>
+            <a:ext cx="508000" cy="387985"/>
           </a:xfrm>
           <a:prstGeom prst="rect">
             <a:avLst/>
@@ -3803,9 +3901,16 @@
           </a:bodyPr>
           <a:lstStyle/>
           <a:p>
-            <a:pPr algn="ctr"/>
-            <a:r>
-              <a:rPr sz="2400" b="1">
+            <a:pPr algn="ctr">
+              <a:spcBef>
+                <a:spcPts val="0"/>
+              </a:spcBef>
+              <a:spcAft>
+                <a:spcPts val="0"/>
+              </a:spcAft>
+            </a:pPr>
+            <a:r>
+              <a:rPr sz="2400" b="1" lang="zh-CN" altLang="zh-CN">
                 <a:solidFill>
                   <a:srgbClr val="0B3D91"/>
                 </a:solidFill>
@@ -3826,8 +3931,8 @@
         </p:nvSpPr>
         <p:spPr>
           <a:xfrm>
-            <a:off x="3333750" y="1765300"/>
-            <a:ext cx="1409700" cy="215900"/>
+            <a:off x="3333750" y="1740217"/>
+            <a:ext cx="1409700" cy="266065"/>
           </a:xfrm>
           <a:prstGeom prst="rect">
             <a:avLst/>
@@ -3840,9 +3945,16 @@
           </a:bodyPr>
           <a:lstStyle/>
           <a:p>
-            <a:pPr algn="l"/>
-            <a:r>
-              <a:rPr sz="1600" b="1">
+            <a:pPr algn="l">
+              <a:spcBef>
+                <a:spcPts val="0"/>
+              </a:spcBef>
+              <a:spcAft>
+                <a:spcPts val="0"/>
+              </a:spcAft>
+            </a:pPr>
+            <a:r>
+              <a:rPr sz="1600" b="1" lang="zh-CN" altLang="zh-CN">
                 <a:solidFill>
                   <a:srgbClr val="14213D"/>
                 </a:solidFill>
@@ -3877,9 +3989,16 @@
           </a:bodyPr>
           <a:lstStyle/>
           <a:p>
-            <a:pPr algn="l"/>
-            <a:r>
-              <a:rPr sz="1050" b="0">
+            <a:pPr algn="l">
+              <a:spcBef>
+                <a:spcPts val="0"/>
+              </a:spcBef>
+              <a:spcAft>
+                <a:spcPts val="0"/>
+              </a:spcAft>
+            </a:pPr>
+            <a:r>
+              <a:rPr sz="1050" b="0" lang="zh-CN" altLang="zh-CN">
                 <a:solidFill>
                   <a:srgbClr val="14213D"/>
                 </a:solidFill>
@@ -3933,7 +4052,14 @@
           <a:bodyPr rtlCol="0" anchor="ctr"/>
           <a:lstStyle/>
           <a:p>
-            <a:pPr algn="ctr"/>
+            <a:pPr algn="ctr">
+              <a:spcBef>
+                <a:spcPts val="0"/>
+              </a:spcBef>
+              <a:spcAft>
+                <a:spcPts val="0"/>
+              </a:spcAft>
+            </a:pPr>
           </a:p>
         </p:txBody>
       </p:sp>
@@ -3979,7 +4105,14 @@
           <a:bodyPr rtlCol="0" anchor="ctr"/>
           <a:lstStyle/>
           <a:p>
-            <a:pPr algn="ctr"/>
+            <a:pPr algn="ctr">
+              <a:spcBef>
+                <a:spcPts val="0"/>
+              </a:spcBef>
+              <a:spcAft>
+                <a:spcPts val="0"/>
+              </a:spcAft>
+            </a:pPr>
           </a:p>
         </p:txBody>
       </p:sp>
@@ -4077,9 +4210,16 @@
           </a:bodyPr>
           <a:lstStyle/>
           <a:p>
-            <a:pPr algn="ctr"/>
-            <a:r>
-              <a:rPr sz="1100" b="0">
+            <a:pPr algn="ctr">
+              <a:spcBef>
+                <a:spcPts val="0"/>
+              </a:spcBef>
+              <a:spcAft>
+                <a:spcPts val="0"/>
+              </a:spcAft>
+            </a:pPr>
+            <a:r>
+              <a:rPr sz="1100" b="0" lang="zh-CN" altLang="zh-CN">
                 <a:solidFill>
                   <a:srgbClr val="617089"/>
                 </a:solidFill>
@@ -4114,9 +4254,16 @@
           </a:bodyPr>
           <a:lstStyle/>
           <a:p>
-            <a:pPr algn="l"/>
-            <a:r>
-              <a:rPr sz="1000" b="0">
+            <a:pPr algn="l">
+              <a:spcBef>
+                <a:spcPts val="0"/>
+              </a:spcBef>
+              <a:spcAft>
+                <a:spcPts val="0"/>
+              </a:spcAft>
+            </a:pPr>
+            <a:r>
+              <a:rPr sz="1000" b="0" lang="zh-CN" altLang="zh-CN">
                 <a:solidFill>
                   <a:srgbClr val="14213D"/>
                 </a:solidFill>
@@ -4151,9 +4298,16 @@
           </a:bodyPr>
           <a:lstStyle/>
           <a:p>
-            <a:pPr algn="l"/>
-            <a:r>
-              <a:rPr sz="1000" b="0">
+            <a:pPr algn="l">
+              <a:spcBef>
+                <a:spcPts val="0"/>
+              </a:spcBef>
+              <a:spcAft>
+                <a:spcPts val="0"/>
+              </a:spcAft>
+            </a:pPr>
+            <a:r>
+              <a:rPr sz="1000" b="0" lang="zh-CN" altLang="zh-CN">
                 <a:solidFill>
                   <a:srgbClr val="14213D"/>
                 </a:solidFill>
@@ -4174,8 +4328,8 @@
         </p:nvSpPr>
         <p:spPr>
           <a:xfrm>
-            <a:off x="4876800" y="1727200"/>
-            <a:ext cx="508000" cy="317500"/>
+            <a:off x="4876800" y="1691957"/>
+            <a:ext cx="508000" cy="387985"/>
           </a:xfrm>
           <a:prstGeom prst="rect">
             <a:avLst/>
@@ -4188,9 +4342,16 @@
           </a:bodyPr>
           <a:lstStyle/>
           <a:p>
-            <a:pPr algn="ctr"/>
-            <a:r>
-              <a:rPr sz="2400" b="1">
+            <a:pPr algn="ctr">
+              <a:spcBef>
+                <a:spcPts val="0"/>
+              </a:spcBef>
+              <a:spcAft>
+                <a:spcPts val="0"/>
+              </a:spcAft>
+            </a:pPr>
+            <a:r>
+              <a:rPr sz="2400" b="1" lang="zh-CN" altLang="zh-CN">
                 <a:solidFill>
                   <a:srgbClr val="0B3D91"/>
                 </a:solidFill>
@@ -4211,8 +4372,8 @@
         </p:nvSpPr>
         <p:spPr>
           <a:xfrm>
-            <a:off x="5397500" y="1765300"/>
-            <a:ext cx="1409700" cy="215900"/>
+            <a:off x="5397500" y="1740217"/>
+            <a:ext cx="1409700" cy="266065"/>
           </a:xfrm>
           <a:prstGeom prst="rect">
             <a:avLst/>
@@ -4225,9 +4386,16 @@
           </a:bodyPr>
           <a:lstStyle/>
           <a:p>
-            <a:pPr algn="l"/>
-            <a:r>
-              <a:rPr sz="1600" b="1">
+            <a:pPr algn="l">
+              <a:spcBef>
+                <a:spcPts val="0"/>
+              </a:spcBef>
+              <a:spcAft>
+                <a:spcPts val="0"/>
+              </a:spcAft>
+            </a:pPr>
+            <a:r>
+              <a:rPr sz="1600" b="1" lang="zh-CN" altLang="zh-CN">
                 <a:solidFill>
                   <a:srgbClr val="14213D"/>
                 </a:solidFill>
@@ -4262,9 +4430,16 @@
           </a:bodyPr>
           <a:lstStyle/>
           <a:p>
-            <a:pPr algn="l"/>
-            <a:r>
-              <a:rPr sz="1050" b="0">
+            <a:pPr algn="l">
+              <a:spcBef>
+                <a:spcPts val="0"/>
+              </a:spcBef>
+              <a:spcAft>
+                <a:spcPts val="0"/>
+              </a:spcAft>
+            </a:pPr>
+            <a:r>
+              <a:rPr sz="1050" b="0" lang="zh-CN" altLang="zh-CN">
                 <a:solidFill>
                   <a:srgbClr val="14213D"/>
                 </a:solidFill>
@@ -4318,7 +4493,14 @@
           <a:bodyPr rtlCol="0" anchor="ctr"/>
           <a:lstStyle/>
           <a:p>
-            <a:pPr algn="ctr"/>
+            <a:pPr algn="ctr">
+              <a:spcBef>
+                <a:spcPts val="0"/>
+              </a:spcBef>
+              <a:spcAft>
+                <a:spcPts val="0"/>
+              </a:spcAft>
+            </a:pPr>
           </a:p>
         </p:txBody>
       </p:sp>
@@ -4364,7 +4546,14 @@
           <a:bodyPr rtlCol="0" anchor="ctr"/>
           <a:lstStyle/>
           <a:p>
-            <a:pPr algn="ctr"/>
+            <a:pPr algn="ctr">
+              <a:spcBef>
+                <a:spcPts val="0"/>
+              </a:spcBef>
+              <a:spcAft>
+                <a:spcPts val="0"/>
+              </a:spcAft>
+            </a:pPr>
           </a:p>
         </p:txBody>
       </p:sp>
@@ -4462,9 +4651,16 @@
           </a:bodyPr>
           <a:lstStyle/>
           <a:p>
-            <a:pPr algn="ctr"/>
-            <a:r>
-              <a:rPr sz="1100" b="0">
+            <a:pPr algn="ctr">
+              <a:spcBef>
+                <a:spcPts val="0"/>
+              </a:spcBef>
+              <a:spcAft>
+                <a:spcPts val="0"/>
+              </a:spcAft>
+            </a:pPr>
+            <a:r>
+              <a:rPr sz="1100" b="0" lang="zh-CN" altLang="zh-CN">
                 <a:solidFill>
                   <a:srgbClr val="617089"/>
                 </a:solidFill>
@@ -4499,9 +4695,16 @@
           </a:bodyPr>
           <a:lstStyle/>
           <a:p>
-            <a:pPr algn="l"/>
-            <a:r>
-              <a:rPr sz="1000" b="0">
+            <a:pPr algn="l">
+              <a:spcBef>
+                <a:spcPts val="0"/>
+              </a:spcBef>
+              <a:spcAft>
+                <a:spcPts val="0"/>
+              </a:spcAft>
+            </a:pPr>
+            <a:r>
+              <a:rPr sz="1000" b="0" lang="zh-CN" altLang="zh-CN">
                 <a:solidFill>
                   <a:srgbClr val="14213D"/>
                 </a:solidFill>
@@ -4536,9 +4739,16 @@
           </a:bodyPr>
           <a:lstStyle/>
           <a:p>
-            <a:pPr algn="l"/>
-            <a:r>
-              <a:rPr sz="1000" b="0">
+            <a:pPr algn="l">
+              <a:spcBef>
+                <a:spcPts val="0"/>
+              </a:spcBef>
+              <a:spcAft>
+                <a:spcPts val="0"/>
+              </a:spcAft>
+            </a:pPr>
+            <a:r>
+              <a:rPr sz="1000" b="0" lang="zh-CN" altLang="zh-CN">
                 <a:solidFill>
                   <a:srgbClr val="14213D"/>
                 </a:solidFill>
@@ -4559,8 +4769,8 @@
         </p:nvSpPr>
         <p:spPr>
           <a:xfrm>
-            <a:off x="6940550" y="1727200"/>
-            <a:ext cx="508000" cy="317500"/>
+            <a:off x="6940550" y="1691957"/>
+            <a:ext cx="508000" cy="387985"/>
           </a:xfrm>
           <a:prstGeom prst="rect">
             <a:avLst/>
@@ -4573,9 +4783,16 @@
           </a:bodyPr>
           <a:lstStyle/>
           <a:p>
-            <a:pPr algn="ctr"/>
-            <a:r>
-              <a:rPr sz="2400" b="1">
+            <a:pPr algn="ctr">
+              <a:spcBef>
+                <a:spcPts val="0"/>
+              </a:spcBef>
+              <a:spcAft>
+                <a:spcPts val="0"/>
+              </a:spcAft>
+            </a:pPr>
+            <a:r>
+              <a:rPr sz="2400" b="1" lang="zh-CN" altLang="zh-CN">
                 <a:solidFill>
                   <a:srgbClr val="008C95"/>
                 </a:solidFill>
@@ -4596,8 +4813,8 @@
         </p:nvSpPr>
         <p:spPr>
           <a:xfrm>
-            <a:off x="7461250" y="1765300"/>
-            <a:ext cx="1409700" cy="215900"/>
+            <a:off x="7461250" y="1740217"/>
+            <a:ext cx="1409700" cy="266065"/>
           </a:xfrm>
           <a:prstGeom prst="rect">
             <a:avLst/>
@@ -4610,9 +4827,16 @@
           </a:bodyPr>
           <a:lstStyle/>
           <a:p>
-            <a:pPr algn="l"/>
-            <a:r>
-              <a:rPr sz="1600" b="1">
+            <a:pPr algn="l">
+              <a:spcBef>
+                <a:spcPts val="0"/>
+              </a:spcBef>
+              <a:spcAft>
+                <a:spcPts val="0"/>
+              </a:spcAft>
+            </a:pPr>
+            <a:r>
+              <a:rPr sz="1600" b="1" lang="zh-CN" altLang="zh-CN">
                 <a:solidFill>
                   <a:srgbClr val="14213D"/>
                 </a:solidFill>
@@ -4647,9 +4871,16 @@
           </a:bodyPr>
           <a:lstStyle/>
           <a:p>
-            <a:pPr algn="l"/>
-            <a:r>
-              <a:rPr sz="1050" b="0">
+            <a:pPr algn="l">
+              <a:spcBef>
+                <a:spcPts val="0"/>
+              </a:spcBef>
+              <a:spcAft>
+                <a:spcPts val="0"/>
+              </a:spcAft>
+            </a:pPr>
+            <a:r>
+              <a:rPr sz="1050" b="0" lang="zh-CN" altLang="zh-CN">
                 <a:solidFill>
                   <a:srgbClr val="14213D"/>
                 </a:solidFill>
@@ -4703,7 +4934,14 @@
           <a:bodyPr rtlCol="0" anchor="ctr"/>
           <a:lstStyle/>
           <a:p>
-            <a:pPr algn="ctr"/>
+            <a:pPr algn="ctr">
+              <a:spcBef>
+                <a:spcPts val="0"/>
+              </a:spcBef>
+              <a:spcAft>
+                <a:spcPts val="0"/>
+              </a:spcAft>
+            </a:pPr>
           </a:p>
         </p:txBody>
       </p:sp>
@@ -4749,7 +4987,14 @@
           <a:bodyPr rtlCol="0" anchor="ctr"/>
           <a:lstStyle/>
           <a:p>
-            <a:pPr algn="ctr"/>
+            <a:pPr algn="ctr">
+              <a:spcBef>
+                <a:spcPts val="0"/>
+              </a:spcBef>
+              <a:spcAft>
+                <a:spcPts val="0"/>
+              </a:spcAft>
+            </a:pPr>
           </a:p>
         </p:txBody>
       </p:sp>
@@ -4847,9 +5092,16 @@
           </a:bodyPr>
           <a:lstStyle/>
           <a:p>
-            <a:pPr algn="ctr"/>
-            <a:r>
-              <a:rPr sz="1100" b="0">
+            <a:pPr algn="ctr">
+              <a:spcBef>
+                <a:spcPts val="0"/>
+              </a:spcBef>
+              <a:spcAft>
+                <a:spcPts val="0"/>
+              </a:spcAft>
+            </a:pPr>
+            <a:r>
+              <a:rPr sz="1100" b="0" lang="zh-CN" altLang="zh-CN">
                 <a:solidFill>
                   <a:srgbClr val="617089"/>
                 </a:solidFill>
@@ -4884,9 +5136,16 @@
           </a:bodyPr>
           <a:lstStyle/>
           <a:p>
-            <a:pPr algn="l"/>
-            <a:r>
-              <a:rPr sz="1000" b="0">
+            <a:pPr algn="l">
+              <a:spcBef>
+                <a:spcPts val="0"/>
+              </a:spcBef>
+              <a:spcAft>
+                <a:spcPts val="0"/>
+              </a:spcAft>
+            </a:pPr>
+            <a:r>
+              <a:rPr sz="1000" b="0" lang="zh-CN" altLang="zh-CN">
                 <a:solidFill>
                   <a:srgbClr val="14213D"/>
                 </a:solidFill>
@@ -4921,9 +5180,16 @@
           </a:bodyPr>
           <a:lstStyle/>
           <a:p>
-            <a:pPr algn="l"/>
-            <a:r>
-              <a:rPr sz="1000" b="0">
+            <a:pPr algn="l">
+              <a:spcBef>
+                <a:spcPts val="0"/>
+              </a:spcBef>
+              <a:spcAft>
+                <a:spcPts val="0"/>
+              </a:spcAft>
+            </a:pPr>
+            <a:r>
+              <a:rPr sz="1000" b="0" lang="zh-CN" altLang="zh-CN">
                 <a:solidFill>
                   <a:srgbClr val="14213D"/>
                 </a:solidFill>
@@ -4958,9 +5224,16 @@
           </a:bodyPr>
           <a:lstStyle/>
           <a:p>
-            <a:pPr algn="l"/>
-            <a:r>
-              <a:rPr sz="1050" b="0">
+            <a:pPr algn="l">
+              <a:spcBef>
+                <a:spcPts val="0"/>
+              </a:spcBef>
+              <a:spcAft>
+                <a:spcPts val="0"/>
+              </a:spcAft>
+            </a:pPr>
+            <a:r>
+              <a:rPr sz="1050" b="0" lang="zh-CN" altLang="zh-CN">
                 <a:solidFill>
                   <a:srgbClr val="617089"/>
                 </a:solidFill>
@@ -4995,9 +5268,16 @@
           </a:bodyPr>
           <a:lstStyle/>
           <a:p>
-            <a:pPr algn="l"/>
-            <a:r>
-              <a:rPr sz="1050" b="0">
+            <a:pPr algn="l">
+              <a:spcBef>
+                <a:spcPts val="0"/>
+              </a:spcBef>
+              <a:spcAft>
+                <a:spcPts val="0"/>
+              </a:spcAft>
+            </a:pPr>
+            <a:r>
+              <a:rPr sz="1050" b="0" lang="zh-CN" altLang="zh-CN">
                 <a:solidFill>
                   <a:srgbClr val="617089"/>
                 </a:solidFill>
@@ -5032,9 +5312,16 @@
           </a:bodyPr>
           <a:lstStyle/>
           <a:p>
-            <a:pPr algn="l"/>
-            <a:r>
-              <a:rPr sz="1050" b="0">
+            <a:pPr algn="l">
+              <a:spcBef>
+                <a:spcPts val="0"/>
+              </a:spcBef>
+              <a:spcAft>
+                <a:spcPts val="0"/>
+              </a:spcAft>
+            </a:pPr>
+            <a:r>
+              <a:rPr sz="1050" b="0" lang="zh-CN" altLang="zh-CN">
                 <a:solidFill>
                   <a:srgbClr val="617089"/>
                 </a:solidFill>
@@ -5088,7 +5375,14 @@
           <a:bodyPr rtlCol="0" anchor="ctr"/>
           <a:lstStyle/>
           <a:p>
-            <a:pPr algn="ctr"/>
+            <a:pPr algn="ctr">
+              <a:spcBef>
+                <a:spcPts val="0"/>
+              </a:spcBef>
+              <a:spcAft>
+                <a:spcPts val="0"/>
+              </a:spcAft>
+            </a:pPr>
           </a:p>
         </p:txBody>
       </p:sp>
@@ -5100,8 +5394,8 @@
         </p:nvSpPr>
         <p:spPr>
           <a:xfrm>
-            <a:off x="9474200" y="1663700"/>
-            <a:ext cx="1905000" cy="215900"/>
+            <a:off x="9474200" y="1623377"/>
+            <a:ext cx="1905000" cy="296545"/>
           </a:xfrm>
           <a:prstGeom prst="rect">
             <a:avLst/>
@@ -5114,9 +5408,16 @@
           </a:bodyPr>
           <a:lstStyle/>
           <a:p>
-            <a:pPr algn="l"/>
-            <a:r>
-              <a:rPr sz="1800" b="1">
+            <a:pPr algn="l">
+              <a:spcBef>
+                <a:spcPts val="0"/>
+              </a:spcBef>
+              <a:spcAft>
+                <a:spcPts val="0"/>
+              </a:spcAft>
+            </a:pPr>
+            <a:r>
+              <a:rPr sz="1800" b="1" lang="zh-CN" altLang="zh-CN">
                 <a:solidFill>
                   <a:srgbClr val="0B3D91"/>
                 </a:solidFill>
@@ -5170,7 +5471,14 @@
           <a:bodyPr rtlCol="0" anchor="ctr"/>
           <a:lstStyle/>
           <a:p>
-            <a:pPr algn="ctr"/>
+            <a:pPr algn="ctr">
+              <a:spcBef>
+                <a:spcPts val="0"/>
+              </a:spcBef>
+              <a:spcAft>
+                <a:spcPts val="0"/>
+              </a:spcAft>
+            </a:pPr>
           </a:p>
         </p:txBody>
       </p:sp>
@@ -5252,8 +5560,8 @@
         </p:nvSpPr>
         <p:spPr>
           <a:xfrm>
-            <a:off x="9906000" y="2095500"/>
-            <a:ext cx="1587500" cy="393700"/>
+            <a:off x="9829799" y="2095500"/>
+            <a:ext cx="1739900" cy="393700"/>
           </a:xfrm>
           <a:prstGeom prst="rect">
             <a:avLst/>
@@ -5266,9 +5574,16 @@
           </a:bodyPr>
           <a:lstStyle/>
           <a:p>
-            <a:pPr algn="l"/>
-            <a:r>
-              <a:rPr sz="1100" b="0">
+            <a:pPr algn="l">
+              <a:spcBef>
+                <a:spcPts val="0"/>
+              </a:spcBef>
+              <a:spcAft>
+                <a:spcPts val="0"/>
+              </a:spcAft>
+            </a:pPr>
+            <a:r>
+              <a:rPr sz="1100" b="0" lang="zh-CN" altLang="zh-CN">
                 <a:solidFill>
                   <a:srgbClr val="14213D"/>
                 </a:solidFill>
@@ -5358,7 +5673,14 @@
           <a:bodyPr rtlCol="0" anchor="ctr"/>
           <a:lstStyle/>
           <a:p>
-            <a:pPr algn="ctr"/>
+            <a:pPr algn="ctr">
+              <a:spcBef>
+                <a:spcPts val="0"/>
+              </a:spcBef>
+              <a:spcAft>
+                <a:spcPts val="0"/>
+              </a:spcAft>
+            </a:pPr>
           </a:p>
         </p:txBody>
       </p:sp>
@@ -5440,8 +5762,8 @@
         </p:nvSpPr>
         <p:spPr>
           <a:xfrm>
-            <a:off x="9906000" y="2882900"/>
-            <a:ext cx="1587500" cy="393700"/>
+            <a:off x="9829799" y="2882900"/>
+            <a:ext cx="1739900" cy="393700"/>
           </a:xfrm>
           <a:prstGeom prst="rect">
             <a:avLst/>
@@ -5454,9 +5776,16 @@
           </a:bodyPr>
           <a:lstStyle/>
           <a:p>
-            <a:pPr algn="l"/>
-            <a:r>
-              <a:rPr sz="1100" b="0">
+            <a:pPr algn="l">
+              <a:spcBef>
+                <a:spcPts val="0"/>
+              </a:spcBef>
+              <a:spcAft>
+                <a:spcPts val="0"/>
+              </a:spcAft>
+            </a:pPr>
+            <a:r>
+              <a:rPr sz="1100" b="0" lang="zh-CN" altLang="zh-CN">
                 <a:solidFill>
                   <a:srgbClr val="14213D"/>
                 </a:solidFill>
@@ -5546,7 +5875,14 @@
           <a:bodyPr rtlCol="0" anchor="ctr"/>
           <a:lstStyle/>
           <a:p>
-            <a:pPr algn="ctr"/>
+            <a:pPr algn="ctr">
+              <a:spcBef>
+                <a:spcPts val="0"/>
+              </a:spcBef>
+              <a:spcAft>
+                <a:spcPts val="0"/>
+              </a:spcAft>
+            </a:pPr>
           </a:p>
         </p:txBody>
       </p:sp>
@@ -5628,8 +5964,8 @@
         </p:nvSpPr>
         <p:spPr>
           <a:xfrm>
-            <a:off x="9906000" y="3670300"/>
-            <a:ext cx="1587500" cy="393700"/>
+            <a:off x="9829799" y="3670300"/>
+            <a:ext cx="1739900" cy="393700"/>
           </a:xfrm>
           <a:prstGeom prst="rect">
             <a:avLst/>
@@ -5642,9 +5978,16 @@
           </a:bodyPr>
           <a:lstStyle/>
           <a:p>
-            <a:pPr algn="l"/>
-            <a:r>
-              <a:rPr sz="1100" b="0">
+            <a:pPr algn="l">
+              <a:spcBef>
+                <a:spcPts val="0"/>
+              </a:spcBef>
+              <a:spcAft>
+                <a:spcPts val="0"/>
+              </a:spcAft>
+            </a:pPr>
+            <a:r>
+              <a:rPr sz="1100" b="0" lang="zh-CN" altLang="zh-CN">
                 <a:solidFill>
                   <a:srgbClr val="14213D"/>
                 </a:solidFill>
@@ -5734,7 +6077,14 @@
           <a:bodyPr rtlCol="0" anchor="ctr"/>
           <a:lstStyle/>
           <a:p>
-            <a:pPr algn="ctr"/>
+            <a:pPr algn="ctr">
+              <a:spcBef>
+                <a:spcPts val="0"/>
+              </a:spcBef>
+              <a:spcAft>
+                <a:spcPts val="0"/>
+              </a:spcAft>
+            </a:pPr>
           </a:p>
         </p:txBody>
       </p:sp>
@@ -5816,8 +6166,8 @@
         </p:nvSpPr>
         <p:spPr>
           <a:xfrm>
-            <a:off x="9906000" y="4457700"/>
-            <a:ext cx="1587500" cy="393700"/>
+            <a:off x="9829799" y="4457700"/>
+            <a:ext cx="1739900" cy="393700"/>
           </a:xfrm>
           <a:prstGeom prst="rect">
             <a:avLst/>
@@ -5830,9 +6180,16 @@
           </a:bodyPr>
           <a:lstStyle/>
           <a:p>
-            <a:pPr algn="l"/>
-            <a:r>
-              <a:rPr sz="1100" b="0">
+            <a:pPr algn="l">
+              <a:spcBef>
+                <a:spcPts val="0"/>
+              </a:spcBef>
+              <a:spcAft>
+                <a:spcPts val="0"/>
+              </a:spcAft>
+            </a:pPr>
+            <a:r>
+              <a:rPr sz="1100" b="0" lang="zh-CN" altLang="zh-CN">
                 <a:solidFill>
                   <a:srgbClr val="14213D"/>
                 </a:solidFill>
@@ -5886,7 +6243,14 @@
           <a:bodyPr rtlCol="0" anchor="ctr"/>
           <a:lstStyle/>
           <a:p>
-            <a:pPr algn="ctr"/>
+            <a:pPr algn="ctr">
+              <a:spcBef>
+                <a:spcPts val="0"/>
+              </a:spcBef>
+              <a:spcAft>
+                <a:spcPts val="0"/>
+              </a:spcAft>
+            </a:pPr>
           </a:p>
         </p:txBody>
       </p:sp>
@@ -5931,7 +6295,14 @@
           <a:bodyPr rtlCol="0" anchor="ctr"/>
           <a:lstStyle/>
           <a:p>
-            <a:pPr algn="ctr"/>
+            <a:pPr algn="ctr">
+              <a:spcBef>
+                <a:spcPts val="0"/>
+              </a:spcBef>
+              <a:spcAft>
+                <a:spcPts val="0"/>
+              </a:spcAft>
+            </a:pPr>
           </a:p>
         </p:txBody>
       </p:sp>
@@ -6013,8 +6384,8 @@
         </p:nvSpPr>
         <p:spPr>
           <a:xfrm>
-            <a:off x="927100" y="5448300"/>
-            <a:ext cx="1854200" cy="190500"/>
+            <a:off x="927100" y="5429567"/>
+            <a:ext cx="1854200" cy="227965"/>
           </a:xfrm>
           <a:prstGeom prst="rect">
             <a:avLst/>
@@ -6027,9 +6398,16 @@
           </a:bodyPr>
           <a:lstStyle/>
           <a:p>
-            <a:pPr algn="l"/>
-            <a:r>
-              <a:rPr sz="1350" b="1">
+            <a:pPr algn="l">
+              <a:spcBef>
+                <a:spcPts val="0"/>
+              </a:spcBef>
+              <a:spcAft>
+                <a:spcPts val="0"/>
+              </a:spcAft>
+            </a:pPr>
+            <a:r>
+              <a:rPr sz="1350" b="1" lang="zh-CN" altLang="zh-CN">
                 <a:solidFill>
                   <a:srgbClr val="0B3D91"/>
                 </a:solidFill>
@@ -6064,9 +6442,16 @@
           </a:bodyPr>
           <a:lstStyle/>
           <a:p>
-            <a:pPr algn="l"/>
-            <a:r>
-              <a:rPr sz="1050" b="0">
+            <a:pPr algn="l">
+              <a:spcBef>
+                <a:spcPts val="0"/>
+              </a:spcBef>
+              <a:spcAft>
+                <a:spcPts val="0"/>
+              </a:spcAft>
+            </a:pPr>
+            <a:r>
+              <a:rPr sz="1050" b="0" lang="zh-CN" altLang="zh-CN">
                 <a:solidFill>
                   <a:srgbClr val="14213D"/>
                 </a:solidFill>
@@ -6120,7 +6505,14 @@
           <a:bodyPr rtlCol="0" anchor="ctr"/>
           <a:lstStyle/>
           <a:p>
-            <a:pPr algn="ctr"/>
+            <a:pPr algn="ctr">
+              <a:spcBef>
+                <a:spcPts val="0"/>
+              </a:spcBef>
+              <a:spcAft>
+                <a:spcPts val="0"/>
+              </a:spcAft>
+            </a:pPr>
           </a:p>
         </p:txBody>
       </p:sp>
@@ -6202,8 +6594,8 @@
         </p:nvSpPr>
         <p:spPr>
           <a:xfrm>
-            <a:off x="3511550" y="5448300"/>
-            <a:ext cx="1854200" cy="190500"/>
+            <a:off x="3511550" y="5429567"/>
+            <a:ext cx="1854200" cy="227965"/>
           </a:xfrm>
           <a:prstGeom prst="rect">
             <a:avLst/>
@@ -6216,9 +6608,16 @@
           </a:bodyPr>
           <a:lstStyle/>
           <a:p>
-            <a:pPr algn="l"/>
-            <a:r>
-              <a:rPr sz="1350" b="1">
+            <a:pPr algn="l">
+              <a:spcBef>
+                <a:spcPts val="0"/>
+              </a:spcBef>
+              <a:spcAft>
+                <a:spcPts val="0"/>
+              </a:spcAft>
+            </a:pPr>
+            <a:r>
+              <a:rPr sz="1350" b="1" lang="zh-CN" altLang="zh-CN">
                 <a:solidFill>
                   <a:srgbClr val="0B3D91"/>
                 </a:solidFill>
@@ -6253,9 +6652,16 @@
           </a:bodyPr>
           <a:lstStyle/>
           <a:p>
-            <a:pPr algn="l"/>
-            <a:r>
-              <a:rPr sz="1050" b="0">
+            <a:pPr algn="l">
+              <a:spcBef>
+                <a:spcPts val="0"/>
+              </a:spcBef>
+              <a:spcAft>
+                <a:spcPts val="0"/>
+              </a:spcAft>
+            </a:pPr>
+            <a:r>
+              <a:rPr sz="1050" b="0" lang="zh-CN" altLang="zh-CN">
                 <a:solidFill>
                   <a:srgbClr val="14213D"/>
                 </a:solidFill>
@@ -6344,7 +6750,14 @@
           <a:bodyPr rtlCol="0" anchor="ctr"/>
           <a:lstStyle/>
           <a:p>
-            <a:pPr algn="ctr"/>
+            <a:pPr algn="ctr">
+              <a:spcBef>
+                <a:spcPts val="0"/>
+              </a:spcBef>
+              <a:spcAft>
+                <a:spcPts val="0"/>
+              </a:spcAft>
+            </a:pPr>
           </a:p>
         </p:txBody>
       </p:sp>
@@ -6426,8 +6839,8 @@
         </p:nvSpPr>
         <p:spPr>
           <a:xfrm>
-            <a:off x="6096000" y="5448300"/>
-            <a:ext cx="1854200" cy="190500"/>
+            <a:off x="6096000" y="5429567"/>
+            <a:ext cx="1854200" cy="227965"/>
           </a:xfrm>
           <a:prstGeom prst="rect">
             <a:avLst/>
@@ -6440,9 +6853,16 @@
           </a:bodyPr>
           <a:lstStyle/>
           <a:p>
-            <a:pPr algn="l"/>
-            <a:r>
-              <a:rPr sz="1350" b="1">
+            <a:pPr algn="l">
+              <a:spcBef>
+                <a:spcPts val="0"/>
+              </a:spcBef>
+              <a:spcAft>
+                <a:spcPts val="0"/>
+              </a:spcAft>
+            </a:pPr>
+            <a:r>
+              <a:rPr sz="1350" b="1" lang="zh-CN" altLang="zh-CN">
                 <a:solidFill>
                   <a:srgbClr val="0B3D91"/>
                 </a:solidFill>
@@ -6477,9 +6897,16 @@
           </a:bodyPr>
           <a:lstStyle/>
           <a:p>
-            <a:pPr algn="l"/>
-            <a:r>
-              <a:rPr sz="1050" b="0">
+            <a:pPr algn="l">
+              <a:spcBef>
+                <a:spcPts val="0"/>
+              </a:spcBef>
+              <a:spcAft>
+                <a:spcPts val="0"/>
+              </a:spcAft>
+            </a:pPr>
+            <a:r>
+              <a:rPr sz="1050" b="0" lang="zh-CN" altLang="zh-CN">
                 <a:solidFill>
                   <a:srgbClr val="14213D"/>
                 </a:solidFill>
@@ -6568,7 +6995,14 @@
           <a:bodyPr rtlCol="0" anchor="ctr"/>
           <a:lstStyle/>
           <a:p>
-            <a:pPr algn="ctr"/>
+            <a:pPr algn="ctr">
+              <a:spcBef>
+                <a:spcPts val="0"/>
+              </a:spcBef>
+              <a:spcAft>
+                <a:spcPts val="0"/>
+              </a:spcAft>
+            </a:pPr>
           </a:p>
         </p:txBody>
       </p:sp>
@@ -6650,8 +7084,8 @@
         </p:nvSpPr>
         <p:spPr>
           <a:xfrm>
-            <a:off x="8680450" y="5448300"/>
-            <a:ext cx="1854200" cy="190500"/>
+            <a:off x="8680450" y="5429567"/>
+            <a:ext cx="1854200" cy="227965"/>
           </a:xfrm>
           <a:prstGeom prst="rect">
             <a:avLst/>
@@ -6664,9 +7098,16 @@
           </a:bodyPr>
           <a:lstStyle/>
           <a:p>
-            <a:pPr algn="l"/>
-            <a:r>
-              <a:rPr sz="1350" b="1">
+            <a:pPr algn="l">
+              <a:spcBef>
+                <a:spcPts val="0"/>
+              </a:spcBef>
+              <a:spcAft>
+                <a:spcPts val="0"/>
+              </a:spcAft>
+            </a:pPr>
+            <a:r>
+              <a:rPr sz="1350" b="1" lang="zh-CN" altLang="zh-CN">
                 <a:solidFill>
                   <a:srgbClr val="0B3D91"/>
                 </a:solidFill>
@@ -6701,9 +7142,16 @@
           </a:bodyPr>
           <a:lstStyle/>
           <a:p>
-            <a:pPr algn="l"/>
-            <a:r>
-              <a:rPr sz="1050" b="0">
+            <a:pPr algn="l">
+              <a:spcBef>
+                <a:spcPts val="0"/>
+              </a:spcBef>
+              <a:spcAft>
+                <a:spcPts val="0"/>
+              </a:spcAft>
+            </a:pPr>
+            <a:r>
+              <a:rPr sz="1050" b="0" lang="zh-CN" altLang="zh-CN">
                 <a:solidFill>
                   <a:srgbClr val="14213D"/>
                 </a:solidFill>
@@ -6773,9 +7221,16 @@
           </a:bodyPr>
           <a:lstStyle/>
           <a:p>
-            <a:pPr algn="l"/>
-            <a:r>
-              <a:rPr sz="900" b="0">
+            <a:pPr algn="l">
+              <a:spcBef>
+                <a:spcPts val="0"/>
+              </a:spcBef>
+              <a:spcAft>
+                <a:spcPts val="0"/>
+              </a:spcAft>
+            </a:pPr>
+            <a:r>
+              <a:rPr sz="900" b="0" lang="zh-CN" altLang="zh-CN">
                 <a:solidFill>
                   <a:srgbClr val="617089"/>
                 </a:solidFill>
